--- a/Capstone/step4/slides/Springboard Step 4 slides.pptx
+++ b/Capstone/step4/slides/Springboard Step 4 slides.pptx
@@ -6737,7 +6737,7 @@
             <a:tbl>
               <a:tblPr>
                 <a:noFill/>
-                <a:tableStyleId>{42989465-6DD6-43E2-9F62-2A3F7CD731B6}</a:tableStyleId>
+                <a:tableStyleId>{72EA09C5-5880-4A2D-B606-AEB3A7E5335E}</a:tableStyleId>
               </a:tblPr>
               <a:tblGrid>
                 <a:gridCol w="3619500"/>
@@ -7908,13 +7908,13 @@
             <a:tbl>
               <a:tblPr>
                 <a:noFill/>
-                <a:tableStyleId>{42989465-6DD6-43E2-9F62-2A3F7CD731B6}</a:tableStyleId>
+                <a:tableStyleId>{72EA09C5-5880-4A2D-B606-AEB3A7E5335E}</a:tableStyleId>
               </a:tblPr>
               <a:tblGrid>
-                <a:gridCol w="4467375"/>
-                <a:gridCol w="4467375"/>
+                <a:gridCol w="3404900"/>
+                <a:gridCol w="3404900"/>
               </a:tblGrid>
-              <a:tr h="597800">
+              <a:tr h="370775">
                 <a:tc>
                   <a:txBody>
                     <a:bodyPr/>
@@ -7962,7 +7962,7 @@
                   <a:tcPr marT="91425" marB="91425" marR="91425" marL="91425"/>
                 </a:tc>
               </a:tr>
-              <a:tr h="597800">
+              <a:tr h="370775">
                 <a:tc>
                   <a:txBody>
                     <a:bodyPr/>
@@ -8010,7 +8010,7 @@
                   <a:tcPr marT="91425" marB="91425" marR="91425" marL="91425"/>
                 </a:tc>
               </a:tr>
-              <a:tr h="597800">
+              <a:tr h="370775">
                 <a:tc>
                   <a:txBody>
                     <a:bodyPr/>
@@ -8058,7 +8058,7 @@
                   <a:tcPr marT="91425" marB="91425" marR="91425" marL="91425"/>
                 </a:tc>
               </a:tr>
-              <a:tr h="597800">
+              <a:tr h="370775">
                 <a:tc>
                   <a:txBody>
                     <a:bodyPr/>
@@ -8106,7 +8106,7 @@
                   <a:tcPr marT="91425" marB="91425" marR="91425" marL="91425"/>
                 </a:tc>
               </a:tr>
-              <a:tr h="597800">
+              <a:tr h="370775">
                 <a:tc>
                   <a:txBody>
                     <a:bodyPr/>
@@ -8154,7 +8154,7 @@
                   <a:tcPr marT="91425" marB="91425" marR="91425" marL="91425"/>
                 </a:tc>
               </a:tr>
-              <a:tr h="597800">
+              <a:tr h="370775">
                 <a:tc>
                   <a:txBody>
                     <a:bodyPr/>
@@ -8206,6 +8206,56 @@
           </a:graphicData>
         </a:graphic>
       </p:graphicFrame>
+      <p:sp>
+        <p:nvSpPr>
+          <p:cNvPr id="89" name="Google Shape;89;p17"/>
+          <p:cNvSpPr txBox="1"/>
+          <p:nvPr/>
+        </p:nvSpPr>
+        <p:spPr>
+          <a:xfrm>
+            <a:off x="113400" y="4286975"/>
+            <a:ext cx="8661000" cy="461700"/>
+          </a:xfrm>
+          <a:prstGeom prst="rect">
+            <a:avLst/>
+          </a:prstGeom>
+          <a:noFill/>
+          <a:ln>
+            <a:noFill/>
+          </a:ln>
+        </p:spPr>
+        <p:txBody>
+          <a:bodyPr anchorCtr="0" anchor="t" bIns="91425" lIns="91425" spcFirstLastPara="1" rIns="91425" wrap="square" tIns="91425">
+            <a:spAutoFit/>
+          </a:bodyPr>
+          <a:lstStyle/>
+          <a:p>
+            <a:pPr indent="0" lvl="0" marL="0" rtl="0" algn="l">
+              <a:spcBef>
+                <a:spcPts val="0"/>
+              </a:spcBef>
+              <a:spcAft>
+                <a:spcPts val="0"/>
+              </a:spcAft>
+              <a:buNone/>
+            </a:pPr>
+            <a:r>
+              <a:rPr lang="en" sz="1800">
+                <a:solidFill>
+                  <a:schemeClr val="dk2"/>
+                </a:solidFill>
+              </a:rPr>
+              <a:t>Datasets used: COCO Val2017 captions, Stable Diffusion prompt pairs, and Flickr</a:t>
+            </a:r>
+            <a:endParaRPr sz="1800">
+              <a:solidFill>
+                <a:schemeClr val="dk2"/>
+              </a:solidFill>
+            </a:endParaRPr>
+          </a:p>
+        </p:txBody>
+      </p:sp>
     </p:spTree>
   </p:cSld>
   <p:clrMapOvr>
